--- a/training/English (en)/Refinement and Publication Training [R&P]/05 Proofreading/Proofreading - Slides.pptx
+++ b/training/English (en)/Refinement and Publication Training [R&P]/05 Proofreading/Proofreading - Slides.pptx
@@ -161,7 +161,7 @@
   <pc:docChgLst>
     <pc:chgData name="Debbie Shaw" userId="79bf7848-a030-4096-934a-3abbfde4984a" providerId="ADAL" clId="{8DE9E9FB-001C-4B84-83DE-E1F7ABB9FAA3}"/>
     <pc:docChg chg="modSld">
-      <pc:chgData name="Debbie Shaw" userId="79bf7848-a030-4096-934a-3abbfde4984a" providerId="ADAL" clId="{8DE9E9FB-001C-4B84-83DE-E1F7ABB9FAA3}" dt="2026-07-18T05:52:22.154" v="9" actId="1076"/>
+      <pc:chgData name="Debbie Shaw" userId="79bf7848-a030-4096-934a-3abbfde4984a" providerId="ADAL" clId="{8DE9E9FB-001C-4B84-83DE-E1F7ABB9FAA3}" dt="2026-07-31T05:05:52.367" v="48" actId="1076"/>
       <pc:docMkLst>
         <pc:docMk/>
       </pc:docMkLst>
@@ -177,6 +177,156 @@
             <pc:docMk/>
             <pc:sldMk cId="3072800876" sldId="280"/>
             <ac:spMk id="2" creationId="{6476A730-1920-53D6-735C-63DC05B161A7}"/>
+          </ac:spMkLst>
+        </pc:spChg>
+      </pc:sldChg>
+      <pc:sldChg chg="modSp mod">
+        <pc:chgData name="Debbie Shaw" userId="79bf7848-a030-4096-934a-3abbfde4984a" providerId="ADAL" clId="{8DE9E9FB-001C-4B84-83DE-E1F7ABB9FAA3}" dt="2026-07-31T04:37:37.314" v="15" actId="20577"/>
+        <pc:sldMkLst>
+          <pc:docMk/>
+          <pc:sldMk cId="2161788803" sldId="281"/>
+        </pc:sldMkLst>
+        <pc:spChg chg="mod">
+          <ac:chgData name="Debbie Shaw" userId="79bf7848-a030-4096-934a-3abbfde4984a" providerId="ADAL" clId="{8DE9E9FB-001C-4B84-83DE-E1F7ABB9FAA3}" dt="2026-07-31T04:37:37.314" v="15" actId="20577"/>
+          <ac:spMkLst>
+            <pc:docMk/>
+            <pc:sldMk cId="2161788803" sldId="281"/>
+            <ac:spMk id="2" creationId="{7B8B0134-0BA8-F0A4-E013-C88DC5AA114A}"/>
+          </ac:spMkLst>
+        </pc:spChg>
+      </pc:sldChg>
+      <pc:sldChg chg="modSp mod">
+        <pc:chgData name="Debbie Shaw" userId="79bf7848-a030-4096-934a-3abbfde4984a" providerId="ADAL" clId="{8DE9E9FB-001C-4B84-83DE-E1F7ABB9FAA3}" dt="2026-07-31T04:38:36.989" v="19" actId="20577"/>
+        <pc:sldMkLst>
+          <pc:docMk/>
+          <pc:sldMk cId="1153904500" sldId="297"/>
+        </pc:sldMkLst>
+        <pc:spChg chg="mod">
+          <ac:chgData name="Debbie Shaw" userId="79bf7848-a030-4096-934a-3abbfde4984a" providerId="ADAL" clId="{8DE9E9FB-001C-4B84-83DE-E1F7ABB9FAA3}" dt="2026-07-31T04:38:36.989" v="19" actId="20577"/>
+          <ac:spMkLst>
+            <pc:docMk/>
+            <pc:sldMk cId="1153904500" sldId="297"/>
+            <ac:spMk id="2" creationId="{7B8B0134-0BA8-F0A4-E013-C88DC5AA114A}"/>
+          </ac:spMkLst>
+        </pc:spChg>
+      </pc:sldChg>
+      <pc:sldChg chg="modSp mod">
+        <pc:chgData name="Debbie Shaw" userId="79bf7848-a030-4096-934a-3abbfde4984a" providerId="ADAL" clId="{8DE9E9FB-001C-4B84-83DE-E1F7ABB9FAA3}" dt="2026-07-31T04:38:32.089" v="18" actId="20577"/>
+        <pc:sldMkLst>
+          <pc:docMk/>
+          <pc:sldMk cId="1332395608" sldId="298"/>
+        </pc:sldMkLst>
+        <pc:spChg chg="mod">
+          <ac:chgData name="Debbie Shaw" userId="79bf7848-a030-4096-934a-3abbfde4984a" providerId="ADAL" clId="{8DE9E9FB-001C-4B84-83DE-E1F7ABB9FAA3}" dt="2026-07-31T04:38:32.089" v="18" actId="20577"/>
+          <ac:spMkLst>
+            <pc:docMk/>
+            <pc:sldMk cId="1332395608" sldId="298"/>
+            <ac:spMk id="2" creationId="{7B8B0134-0BA8-F0A4-E013-C88DC5AA114A}"/>
+          </ac:spMkLst>
+        </pc:spChg>
+      </pc:sldChg>
+      <pc:sldChg chg="modSp mod">
+        <pc:chgData name="Debbie Shaw" userId="79bf7848-a030-4096-934a-3abbfde4984a" providerId="ADAL" clId="{8DE9E9FB-001C-4B84-83DE-E1F7ABB9FAA3}" dt="2026-07-31T04:39:12.268" v="20" actId="20577"/>
+        <pc:sldMkLst>
+          <pc:docMk/>
+          <pc:sldMk cId="2178432557" sldId="299"/>
+        </pc:sldMkLst>
+        <pc:spChg chg="mod">
+          <ac:chgData name="Debbie Shaw" userId="79bf7848-a030-4096-934a-3abbfde4984a" providerId="ADAL" clId="{8DE9E9FB-001C-4B84-83DE-E1F7ABB9FAA3}" dt="2026-07-31T04:39:12.268" v="20" actId="20577"/>
+          <ac:spMkLst>
+            <pc:docMk/>
+            <pc:sldMk cId="2178432557" sldId="299"/>
+            <ac:spMk id="2" creationId="{7B8B0134-0BA8-F0A4-E013-C88DC5AA114A}"/>
+          </ac:spMkLst>
+        </pc:spChg>
+      </pc:sldChg>
+      <pc:sldChg chg="modSp mod">
+        <pc:chgData name="Debbie Shaw" userId="79bf7848-a030-4096-934a-3abbfde4984a" providerId="ADAL" clId="{8DE9E9FB-001C-4B84-83DE-E1F7ABB9FAA3}" dt="2026-07-31T04:39:21.038" v="21" actId="20577"/>
+        <pc:sldMkLst>
+          <pc:docMk/>
+          <pc:sldMk cId="2860938963" sldId="300"/>
+        </pc:sldMkLst>
+        <pc:spChg chg="mod">
+          <ac:chgData name="Debbie Shaw" userId="79bf7848-a030-4096-934a-3abbfde4984a" providerId="ADAL" clId="{8DE9E9FB-001C-4B84-83DE-E1F7ABB9FAA3}" dt="2026-07-31T04:39:21.038" v="21" actId="20577"/>
+          <ac:spMkLst>
+            <pc:docMk/>
+            <pc:sldMk cId="2860938963" sldId="300"/>
+            <ac:spMk id="2" creationId="{7B8B0134-0BA8-F0A4-E013-C88DC5AA114A}"/>
+          </ac:spMkLst>
+        </pc:spChg>
+      </pc:sldChg>
+      <pc:sldChg chg="modSp mod">
+        <pc:chgData name="Debbie Shaw" userId="79bf7848-a030-4096-934a-3abbfde4984a" providerId="ADAL" clId="{8DE9E9FB-001C-4B84-83DE-E1F7ABB9FAA3}" dt="2026-07-31T04:39:25.913" v="22" actId="20577"/>
+        <pc:sldMkLst>
+          <pc:docMk/>
+          <pc:sldMk cId="803728620" sldId="301"/>
+        </pc:sldMkLst>
+        <pc:spChg chg="mod">
+          <ac:chgData name="Debbie Shaw" userId="79bf7848-a030-4096-934a-3abbfde4984a" providerId="ADAL" clId="{8DE9E9FB-001C-4B84-83DE-E1F7ABB9FAA3}" dt="2026-07-31T04:39:25.913" v="22" actId="20577"/>
+          <ac:spMkLst>
+            <pc:docMk/>
+            <pc:sldMk cId="803728620" sldId="301"/>
+            <ac:spMk id="2" creationId="{7B8B0134-0BA8-F0A4-E013-C88DC5AA114A}"/>
+          </ac:spMkLst>
+        </pc:spChg>
+      </pc:sldChg>
+      <pc:sldChg chg="modSp mod">
+        <pc:chgData name="Debbie Shaw" userId="79bf7848-a030-4096-934a-3abbfde4984a" providerId="ADAL" clId="{8DE9E9FB-001C-4B84-83DE-E1F7ABB9FAA3}" dt="2026-07-31T04:38:23.647" v="17" actId="20577"/>
+        <pc:sldMkLst>
+          <pc:docMk/>
+          <pc:sldMk cId="599930455" sldId="302"/>
+        </pc:sldMkLst>
+        <pc:spChg chg="mod">
+          <ac:chgData name="Debbie Shaw" userId="79bf7848-a030-4096-934a-3abbfde4984a" providerId="ADAL" clId="{8DE9E9FB-001C-4B84-83DE-E1F7ABB9FAA3}" dt="2026-07-31T04:38:23.647" v="17" actId="20577"/>
+          <ac:spMkLst>
+            <pc:docMk/>
+            <pc:sldMk cId="599930455" sldId="302"/>
+            <ac:spMk id="2" creationId="{7B8B0134-0BA8-F0A4-E013-C88DC5AA114A}"/>
+          </ac:spMkLst>
+        </pc:spChg>
+      </pc:sldChg>
+      <pc:sldChg chg="modSp mod">
+        <pc:chgData name="Debbie Shaw" userId="79bf7848-a030-4096-934a-3abbfde4984a" providerId="ADAL" clId="{8DE9E9FB-001C-4B84-83DE-E1F7ABB9FAA3}" dt="2026-07-31T04:38:18.690" v="16" actId="20577"/>
+        <pc:sldMkLst>
+          <pc:docMk/>
+          <pc:sldMk cId="3680852828" sldId="304"/>
+        </pc:sldMkLst>
+        <pc:spChg chg="mod">
+          <ac:chgData name="Debbie Shaw" userId="79bf7848-a030-4096-934a-3abbfde4984a" providerId="ADAL" clId="{8DE9E9FB-001C-4B84-83DE-E1F7ABB9FAA3}" dt="2026-07-31T04:38:18.690" v="16" actId="20577"/>
+          <ac:spMkLst>
+            <pc:docMk/>
+            <pc:sldMk cId="3680852828" sldId="304"/>
+            <ac:spMk id="2" creationId="{7B8B0134-0BA8-F0A4-E013-C88DC5AA114A}"/>
+          </ac:spMkLst>
+        </pc:spChg>
+      </pc:sldChg>
+      <pc:sldChg chg="modSp mod">
+        <pc:chgData name="Debbie Shaw" userId="79bf7848-a030-4096-934a-3abbfde4984a" providerId="ADAL" clId="{8DE9E9FB-001C-4B84-83DE-E1F7ABB9FAA3}" dt="2026-07-31T05:05:52.367" v="48" actId="1076"/>
+        <pc:sldMkLst>
+          <pc:docMk/>
+          <pc:sldMk cId="3964580167" sldId="310"/>
+        </pc:sldMkLst>
+        <pc:spChg chg="mod">
+          <ac:chgData name="Debbie Shaw" userId="79bf7848-a030-4096-934a-3abbfde4984a" providerId="ADAL" clId="{8DE9E9FB-001C-4B84-83DE-E1F7ABB9FAA3}" dt="2026-07-31T05:05:52.367" v="48" actId="1076"/>
+          <ac:spMkLst>
+            <pc:docMk/>
+            <pc:sldMk cId="3964580167" sldId="310"/>
+            <ac:spMk id="7" creationId="{F09D1E70-A778-AB73-3A8D-5D5C5F2D2F1E}"/>
+          </ac:spMkLst>
+        </pc:spChg>
+      </pc:sldChg>
+      <pc:sldChg chg="modSp mod">
+        <pc:chgData name="Debbie Shaw" userId="79bf7848-a030-4096-934a-3abbfde4984a" providerId="ADAL" clId="{8DE9E9FB-001C-4B84-83DE-E1F7ABB9FAA3}" dt="2026-07-31T04:37:28.366" v="14" actId="13926"/>
+        <pc:sldMkLst>
+          <pc:docMk/>
+          <pc:sldMk cId="3279659814" sldId="312"/>
+        </pc:sldMkLst>
+        <pc:spChg chg="mod">
+          <ac:chgData name="Debbie Shaw" userId="79bf7848-a030-4096-934a-3abbfde4984a" providerId="ADAL" clId="{8DE9E9FB-001C-4B84-83DE-E1F7ABB9FAA3}" dt="2026-07-31T04:37:28.366" v="14" actId="13926"/>
+          <ac:spMkLst>
+            <pc:docMk/>
+            <pc:sldMk cId="3279659814" sldId="312"/>
+            <ac:spMk id="5" creationId="{44B94828-76C6-9BAE-E786-14FE6277E1DA}"/>
           </ac:spMkLst>
         </pc:spChg>
       </pc:sldChg>
@@ -267,7 +417,7 @@
           <a:p>
             <a:fld id="{AC6AA070-92F4-A447-BB88-F5E94FF9CF8B}" type="datetimeFigureOut">
               <a:rPr lang="en-US" smtClean="0"/>
-              <a:t>7/18/2026</a:t>
+              <a:t>7/31/2026</a:t>
             </a:fld>
             <a:endParaRPr lang="en-US"/>
           </a:p>
@@ -671,7 +821,7 @@
           <a:p>
             <a:fld id="{2D176C0A-5C67-429D-B78E-C0F7FE360763}" type="datetimeFigureOut">
               <a:rPr lang="en-US" smtClean="0"/>
-              <a:t>7/18/2026</a:t>
+              <a:t>7/31/2026</a:t>
             </a:fld>
             <a:endParaRPr lang="en-US"/>
           </a:p>
@@ -3228,7 +3378,7 @@
                 <a:ea typeface="Calibri" panose="020F0502020204030204" pitchFamily="34" charset="0"/>
                 <a:cs typeface="Times New Roman" panose="02020603050405020304" pitchFamily="18" charset="0"/>
               </a:rPr>
-              <a:t>     If we live by </a:t>
+              <a:t>     If, we live by </a:t>
             </a:r>
             <a:r>
               <a:rPr lang="en-US" sz="2400" dirty="0" err="1">
@@ -4143,7 +4293,7 @@
                 <a:ea typeface="Calibri" panose="020F0502020204030204" pitchFamily="34" charset="0"/>
                 <a:cs typeface="Times New Roman" panose="02020603050405020304" pitchFamily="18" charset="0"/>
               </a:rPr>
-              <a:t>f we live by </a:t>
+              <a:t>f, we live by </a:t>
             </a:r>
             <a:r>
               <a:rPr lang="en-US" sz="2400" dirty="0" err="1">
@@ -5865,7 +6015,7 @@
                 <a:ea typeface="Calibri" panose="020F0502020204030204" pitchFamily="34" charset="0"/>
                 <a:cs typeface="Times New Roman" panose="02020603050405020304" pitchFamily="18" charset="0"/>
               </a:rPr>
-              <a:t>     If we live by </a:t>
+              <a:t>     If, we live by </a:t>
             </a:r>
             <a:r>
               <a:rPr lang="en-US" sz="2400" dirty="0" err="1">
@@ -7045,7 +7195,7 @@
                 <a:ea typeface="Calibri" panose="020F0502020204030204" pitchFamily="34" charset="0"/>
                 <a:cs typeface="Times New Roman" panose="02020603050405020304" pitchFamily="18" charset="0"/>
               </a:rPr>
-              <a:t>     If we live by </a:t>
+              <a:t>     If, we live by </a:t>
             </a:r>
             <a:r>
               <a:rPr lang="en-US" sz="2400" dirty="0" err="1">
@@ -7914,7 +8064,7 @@
                 <a:ea typeface="Calibri" panose="020F0502020204030204" pitchFamily="34" charset="0"/>
                 <a:cs typeface="Times New Roman" panose="02020603050405020304" pitchFamily="18" charset="0"/>
               </a:rPr>
-              <a:t>     If we live by </a:t>
+              <a:t>     If, we live by </a:t>
             </a:r>
             <a:r>
               <a:rPr lang="en-US" sz="2400" dirty="0" err="1">
@@ -8348,8 +8498,8 @@
         </p:nvSpPr>
         <p:spPr>
           <a:xfrm>
-            <a:off x="5593404" y="1742877"/>
-            <a:ext cx="3161163" cy="3847207"/>
+            <a:off x="5592343" y="1527432"/>
+            <a:ext cx="3161163" cy="4154984"/>
           </a:xfrm>
           <a:prstGeom prst="rect">
             <a:avLst/>
@@ -8366,6 +8516,25 @@
             <a:spAutoFit/>
           </a:bodyPr>
           <a:lstStyle/>
+          <a:p>
+            <a:pPr marL="0" marR="0">
+              <a:spcBef>
+                <a:spcPts val="0"/>
+              </a:spcBef>
+              <a:spcAft>
+                <a:spcPts val="0"/>
+              </a:spcAft>
+            </a:pPr>
+            <a:r>
+              <a:rPr lang="en-US" sz="2000" b="1" u="sng" kern="100" dirty="0">
+                <a:effectLst/>
+                <a:latin typeface="Aptos" panose="020B0004020202020204" pitchFamily="34" charset="0"/>
+                <a:ea typeface="Aptos" panose="020B0004020202020204" pitchFamily="34" charset="0"/>
+                <a:cs typeface="Times New Roman" panose="02020603050405020304" pitchFamily="18" charset="0"/>
+              </a:rPr>
+              <a:t>Proofreading Checklist</a:t>
+            </a:r>
+          </a:p>
           <a:p>
             <a:pPr marL="0" marR="0">
               <a:spcBef>
@@ -13075,7 +13244,7 @@
                 <a:ea typeface="Calibri" panose="020F0502020204030204" pitchFamily="34" charset="0"/>
                 <a:cs typeface="Times New Roman" panose="02020603050405020304" pitchFamily="18" charset="0"/>
               </a:rPr>
-              <a:t>     If we live by </a:t>
+              <a:t>     If, we live by </a:t>
             </a:r>
             <a:r>
               <a:rPr lang="en-US" sz="2400" dirty="0" err="1">
@@ -13903,7 +14072,7 @@
                 <a:ea typeface="Calibri" panose="020F0502020204030204" pitchFamily="34" charset="0"/>
                 <a:cs typeface="Times New Roman" panose="02020603050405020304" pitchFamily="18" charset="0"/>
               </a:rPr>
-              <a:t>     If we live by </a:t>
+              <a:t>     If, we live by </a:t>
             </a:r>
             <a:r>
               <a:rPr lang="en-US" sz="2400" dirty="0" err="1">
@@ -15205,7 +15374,7 @@
                 <a:ea typeface="Calibri" panose="020F0502020204030204" pitchFamily="34" charset="0"/>
                 <a:cs typeface="Times New Roman" panose="02020603050405020304" pitchFamily="18" charset="0"/>
               </a:rPr>
-              <a:t>     If we live by </a:t>
+              <a:t>     If, we live by </a:t>
             </a:r>
             <a:r>
               <a:rPr lang="en-US" sz="2400" dirty="0" err="1">
@@ -15845,7 +16014,27 @@
                 <a:ea typeface="Calibri" panose="020F0502020204030204" pitchFamily="34" charset="0"/>
                 <a:cs typeface="Times New Roman" panose="02020603050405020304" pitchFamily="18" charset="0"/>
               </a:rPr>
-              <a:t>     If we live by </a:t>
+              <a:t>     If</a:t>
+            </a:r>
+            <a:r>
+              <a:rPr lang="en-US" sz="2400" dirty="0">
+                <a:highlight>
+                  <a:srgbClr val="00FFFF"/>
+                </a:highlight>
+                <a:latin typeface="Arial" panose="020B0604020202020204" pitchFamily="34" charset="0"/>
+                <a:ea typeface="Calibri" panose="020F0502020204030204" pitchFamily="34" charset="0"/>
+                <a:cs typeface="Times New Roman" panose="02020603050405020304" pitchFamily="18" charset="0"/>
+              </a:rPr>
+              <a:t>,</a:t>
+            </a:r>
+            <a:r>
+              <a:rPr lang="en-US" sz="2400" dirty="0">
+                <a:effectLst/>
+                <a:latin typeface="Arial" panose="020B0604020202020204" pitchFamily="34" charset="0"/>
+                <a:ea typeface="Calibri" panose="020F0502020204030204" pitchFamily="34" charset="0"/>
+                <a:cs typeface="Times New Roman" panose="02020603050405020304" pitchFamily="18" charset="0"/>
+              </a:rPr>
+              <a:t> we live by </a:t>
             </a:r>
             <a:r>
               <a:rPr lang="en-US" sz="2400" dirty="0" err="1">
@@ -16030,7 +16219,28 @@
                 <a:ea typeface="Calibri" panose="020F0502020204030204" pitchFamily="34" charset="0"/>
                 <a:cs typeface="Times New Roman" panose="02020603050405020304" pitchFamily="18" charset="0"/>
               </a:rPr>
-              <a:t>If we live by </a:t>
+              <a:t>If</a:t>
+            </a:r>
+            <a:r>
+              <a:rPr lang="en-US" sz="2400" dirty="0">
+                <a:effectLst/>
+                <a:highlight>
+                  <a:srgbClr val="FFFF00"/>
+                </a:highlight>
+                <a:latin typeface="Arial" panose="020B0604020202020204" pitchFamily="34" charset="0"/>
+                <a:ea typeface="Calibri" panose="020F0502020204030204" pitchFamily="34" charset="0"/>
+                <a:cs typeface="Times New Roman" panose="02020603050405020304" pitchFamily="18" charset="0"/>
+              </a:rPr>
+              <a:t> </a:t>
+            </a:r>
+            <a:r>
+              <a:rPr lang="en-US" sz="2400" dirty="0">
+                <a:effectLst/>
+                <a:latin typeface="Arial" panose="020B0604020202020204" pitchFamily="34" charset="0"/>
+                <a:ea typeface="Calibri" panose="020F0502020204030204" pitchFamily="34" charset="0"/>
+                <a:cs typeface="Times New Roman" panose="02020603050405020304" pitchFamily="18" charset="0"/>
+              </a:rPr>
+              <a:t>we live by </a:t>
             </a:r>
             <a:r>
               <a:rPr lang="en-US" sz="2400" dirty="0">
@@ -16686,6 +16896,15 @@
 </file>
 
 <file path=customXml/item2.xml><?xml version="1.0" encoding="utf-8"?>
+<?mso-contentType ?>
+<FormTemplates xmlns="http://schemas.microsoft.com/sharepoint/v3/contenttype/forms">
+  <Display>DocumentLibraryForm</Display>
+  <Edit>DocumentLibraryForm</Edit>
+  <New>DocumentLibraryForm</New>
+</FormTemplates>
+</file>
+
+<file path=customXml/item3.xml><?xml version="1.0" encoding="utf-8"?>
 <ct:contentTypeSchema xmlns:ct="http://schemas.microsoft.com/office/2006/metadata/contentType" xmlns:ma="http://schemas.microsoft.com/office/2006/metadata/properties/metaAttributes" ct:_="" ma:_="" ma:contentTypeName="Document" ma:contentTypeID="0x0101002F017C5ECD5AE84588140775F5D9B6FC" ma:contentTypeVersion="10" ma:contentTypeDescription="Create a new document." ma:contentTypeScope="" ma:versionID="1a5380cb2be4a51461126b02f947e923">
   <xsd:schema xmlns:xsd="http://www.w3.org/2001/XMLSchema" xmlns:xs="http://www.w3.org/2001/XMLSchema" xmlns:p="http://schemas.microsoft.com/office/2006/metadata/properties" xmlns:ns2="fee82e44-1fa4-4144-8309-00fed2bf4198" xmlns:ns3="1a61c928-f5f6-4989-bd5d-cb8872a1b06d" targetNamespace="http://schemas.microsoft.com/office/2006/metadata/properties" ma:root="true" ma:fieldsID="9bf58d68fa2085cb5739c341b0c4cacb" ns2:_="" ns3:_="">
     <xsd:import namespace="fee82e44-1fa4-4144-8309-00fed2bf4198"/>
@@ -16886,15 +17105,6 @@
 </ct:contentTypeSchema>
 </file>
 
-<file path=customXml/item3.xml><?xml version="1.0" encoding="utf-8"?>
-<?mso-contentType ?>
-<FormTemplates xmlns="http://schemas.microsoft.com/sharepoint/v3/contenttype/forms">
-  <Display>DocumentLibraryForm</Display>
-  <Edit>DocumentLibraryForm</Edit>
-  <New>DocumentLibraryForm</New>
-</FormTemplates>
-</file>
-
 <file path=customXml/itemProps1.xml><?xml version="1.0" encoding="utf-8"?>
 <ds:datastoreItem xmlns:ds="http://schemas.openxmlformats.org/officeDocument/2006/customXml" ds:itemID="{DD870300-B03F-45F7-9154-521D8C74684E}">
   <ds:schemaRefs>
@@ -16913,6 +17123,14 @@
 </file>
 
 <file path=customXml/itemProps2.xml><?xml version="1.0" encoding="utf-8"?>
+<ds:datastoreItem xmlns:ds="http://schemas.openxmlformats.org/officeDocument/2006/customXml" ds:itemID="{B178770A-F6AC-406B-AF0D-88CBCF36B701}">
+  <ds:schemaRefs>
+    <ds:schemaRef ds:uri="http://schemas.microsoft.com/sharepoint/v3/contenttype/forms"/>
+  </ds:schemaRefs>
+</ds:datastoreItem>
+</file>
+
+<file path=customXml/itemProps3.xml><?xml version="1.0" encoding="utf-8"?>
 <ds:datastoreItem xmlns:ds="http://schemas.openxmlformats.org/officeDocument/2006/customXml" ds:itemID="{7EFC9941-BFD1-4E35-B3BD-3E79859FF642}">
   <ds:schemaRefs>
     <ds:schemaRef ds:uri="http://schemas.microsoft.com/office/2006/metadata/contentType"/>
@@ -16929,12 +17147,4 @@
     <ds:schemaRef ds:uri="http://schemas.microsoft.com/internal/obd"/>
   </ds:schemaRefs>
 </ds:datastoreItem>
-</file>
-
-<file path=customXml/itemProps3.xml><?xml version="1.0" encoding="utf-8"?>
-<ds:datastoreItem xmlns:ds="http://schemas.openxmlformats.org/officeDocument/2006/customXml" ds:itemID="{B178770A-F6AC-406B-AF0D-88CBCF36B701}">
-  <ds:schemaRefs>
-    <ds:schemaRef ds:uri="http://schemas.microsoft.com/sharepoint/v3/contenttype/forms"/>
-  </ds:schemaRefs>
-</ds:datastoreItem>
 </file>